--- a/Slides/CSC6103/VT-04 Memory Virtualization.pptx
+++ b/Slides/CSC6103/VT-04 Memory Virtualization.pptx
@@ -265,7 +265,7 @@
             <a:fld id="{45BDCE37-E9BE-4280-8D68-34E43D66CEDB}" type="datetimeFigureOut">
               <a:rPr lang="zh-TW" altLang="en-US" smtClean="0"/>
               <a:pPr/>
-              <a:t>2026/4/28</a:t>
+              <a:t>2026/9/29</a:t>
             </a:fld>
             <a:endParaRPr lang="zh-TW" altLang="en-US"/>
           </a:p>
@@ -432,7 +432,7 @@
             <a:fld id="{FBFBA883-381C-409E-9635-BB54B21745E4}" type="datetimeFigureOut">
               <a:rPr lang="zh-TW" altLang="en-US" smtClean="0"/>
               <a:pPr/>
-              <a:t>2026/4/28</a:t>
+              <a:t>2026/9/29</a:t>
             </a:fld>
             <a:endParaRPr lang="zh-TW" altLang="en-US"/>
           </a:p>
@@ -4429,14 +4429,13 @@
               </a:ext>
             </a:extLst>
           </a:blip>
-          <a:stretch>
-            <a:fillRect/>
-          </a:stretch>
+          <a:srcRect b="12144"/>
+          <a:stretch/>
         </p:blipFill>
         <p:spPr>
           <a:xfrm>
-            <a:off x="628903" y="882032"/>
-            <a:ext cx="7886193" cy="3601567"/>
+            <a:off x="354583" y="989656"/>
+            <a:ext cx="8168713" cy="3277544"/>
           </a:xfrm>
         </p:spPr>
       </p:pic>

--- a/Slides/CSC6103/VT-04 Memory Virtualization.pptx
+++ b/Slides/CSC6103/VT-04 Memory Virtualization.pptx
@@ -265,7 +265,7 @@
             <a:fld id="{45BDCE37-E9BE-4280-8D68-34E43D66CEDB}" type="datetimeFigureOut">
               <a:rPr lang="zh-TW" altLang="en-US" smtClean="0"/>
               <a:pPr/>
-              <a:t>2026/4/28</a:t>
+              <a:t>2026/9/27</a:t>
             </a:fld>
             <a:endParaRPr lang="zh-TW" altLang="en-US"/>
           </a:p>
@@ -432,7 +432,7 @@
             <a:fld id="{FBFBA883-381C-409E-9635-BB54B21745E4}" type="datetimeFigureOut">
               <a:rPr lang="zh-TW" altLang="en-US" smtClean="0"/>
               <a:pPr/>
-              <a:t>2026/4/28</a:t>
+              <a:t>2026/9/27</a:t>
             </a:fld>
             <a:endParaRPr lang="zh-TW" altLang="en-US"/>
           </a:p>
@@ -4521,15 +4521,11 @@
           <a:lstStyle/>
           <a:p>
             <a:r>
-              <a:rPr lang="en-US" dirty="0"/>
-              <a:t>Memory </a:t>
-            </a:r>
-            <a:r>
               <a:rPr lang="en-US" dirty="0">
                 <a:latin typeface="Times New Roman" panose="02020603050405020304" pitchFamily="18" charset="0"/>
                 <a:cs typeface="Times New Roman" panose="02020603050405020304" pitchFamily="18" charset="0"/>
               </a:rPr>
-              <a:t>Virtualization</a:t>
+              <a:t>Memory Virtualization</a:t>
             </a:r>
           </a:p>
         </p:txBody>
@@ -4590,7 +4586,7 @@
           <a:bodyPr/>
           <a:lstStyle/>
           <a:p>
-            <a:endParaRPr lang="zh-CN" altLang="en-US"/>
+            <a:endParaRPr lang="zh-CN" altLang="en-US" dirty="0"/>
           </a:p>
         </p:txBody>
       </p:sp>
@@ -23275,7 +23271,7 @@
         </p:nvSpPr>
         <p:spPr>
           <a:xfrm>
-            <a:off x="241844" y="967251"/>
+            <a:off x="241844" y="942975"/>
             <a:ext cx="2644775" cy="366399"/>
           </a:xfrm>
         </p:spPr>
@@ -23444,7 +23440,7 @@
         </p:nvSpPr>
         <p:spPr>
           <a:xfrm>
-            <a:off x="4790232" y="967251"/>
+            <a:off x="4790232" y="942975"/>
             <a:ext cx="3961308" cy="366399"/>
           </a:xfrm>
         </p:spPr>

--- a/Slides/CSC6103/VT-04 Memory Virtualization.pptx
+++ b/Slides/CSC6103/VT-04 Memory Virtualization.pptx
@@ -265,7 +265,7 @@
             <a:fld id="{45BDCE37-E9BE-4280-8D68-34E43D66CEDB}" type="datetimeFigureOut">
               <a:rPr lang="zh-TW" altLang="en-US" smtClean="0"/>
               <a:pPr/>
-              <a:t>2026/9/27</a:t>
+              <a:t>2026/10/8</a:t>
             </a:fld>
             <a:endParaRPr lang="zh-TW" altLang="en-US"/>
           </a:p>
@@ -432,7 +432,7 @@
             <a:fld id="{FBFBA883-381C-409E-9635-BB54B21745E4}" type="datetimeFigureOut">
               <a:rPr lang="zh-TW" altLang="en-US" smtClean="0"/>
               <a:pPr/>
-              <a:t>2026/9/27</a:t>
+              <a:t>2026/10/8</a:t>
             </a:fld>
             <a:endParaRPr lang="zh-TW" altLang="en-US"/>
           </a:p>
@@ -14139,7 +14139,7 @@
         </p:nvGrpSpPr>
         <p:grpSpPr>
           <a:xfrm>
-            <a:off x="1777908" y="2104370"/>
+            <a:off x="1981108" y="1841900"/>
             <a:ext cx="5230481" cy="2147212"/>
             <a:chOff x="2035747" y="2163144"/>
             <a:chExt cx="5230481" cy="2147212"/>
@@ -15230,7 +15230,7 @@
         </p:nvGrpSpPr>
         <p:grpSpPr>
           <a:xfrm>
-            <a:off x="1629151" y="1597869"/>
+            <a:off x="1773085" y="1665602"/>
             <a:ext cx="5885698" cy="2497658"/>
             <a:chOff x="1960050" y="2427160"/>
             <a:chExt cx="4700182" cy="1463329"/>
@@ -16114,7 +16114,7 @@
         </p:nvSpPr>
         <p:spPr>
           <a:xfrm>
-            <a:off x="2779762" y="2098296"/>
+            <a:off x="3118430" y="2276099"/>
             <a:ext cx="1099123" cy="1070492"/>
           </a:xfrm>
           <a:prstGeom prst="ellipse">
@@ -16160,7 +16160,7 @@
         </p:nvSpPr>
         <p:spPr>
           <a:xfrm>
-            <a:off x="2638322" y="1990283"/>
+            <a:off x="2782256" y="2058016"/>
             <a:ext cx="317541" cy="300082"/>
           </a:xfrm>
           <a:prstGeom prst="rect">
@@ -16194,7 +16194,7 @@
         </p:nvCxnSpPr>
         <p:spPr>
           <a:xfrm>
-            <a:off x="4848806" y="1643508"/>
+            <a:off x="5390674" y="1711241"/>
             <a:ext cx="0" cy="2203955"/>
           </a:xfrm>
           <a:prstGeom prst="line">
@@ -16467,7 +16467,7 @@
         </p:nvGrpSpPr>
         <p:grpSpPr>
           <a:xfrm>
-            <a:off x="1884512" y="1960841"/>
+            <a:off x="1859111" y="1799974"/>
             <a:ext cx="5513464" cy="2279385"/>
             <a:chOff x="1960050" y="2423670"/>
             <a:chExt cx="4700182" cy="1466819"/>
@@ -17352,7 +17352,7 @@
         </p:nvSpPr>
         <p:spPr>
           <a:xfrm>
-            <a:off x="4088365" y="2461269"/>
+            <a:off x="4189963" y="2368138"/>
             <a:ext cx="1029610" cy="974616"/>
           </a:xfrm>
           <a:prstGeom prst="ellipse">
@@ -17398,7 +17398,7 @@
         </p:nvSpPr>
         <p:spPr>
           <a:xfrm>
-            <a:off x="3946924" y="2353257"/>
+            <a:off x="3921523" y="2192390"/>
             <a:ext cx="297459" cy="300082"/>
           </a:xfrm>
           <a:prstGeom prst="rect">
@@ -17432,7 +17432,7 @@
         </p:nvCxnSpPr>
         <p:spPr>
           <a:xfrm>
-            <a:off x="5104167" y="2011590"/>
+            <a:off x="5248101" y="1850723"/>
             <a:ext cx="0" cy="2006563"/>
           </a:xfrm>
           <a:prstGeom prst="line">
@@ -17591,7 +17591,7 @@
         </p:nvGrpSpPr>
         <p:grpSpPr>
           <a:xfrm>
-            <a:off x="1510425" y="1774726"/>
+            <a:off x="1569690" y="1740858"/>
             <a:ext cx="5861422" cy="2505962"/>
             <a:chOff x="1960050" y="2423670"/>
             <a:chExt cx="4700182" cy="1466819"/>
@@ -18492,7 +18492,7 @@
         </p:nvCxnSpPr>
         <p:spPr>
           <a:xfrm>
-            <a:off x="4730080" y="1825474"/>
+            <a:off x="5170347" y="1791606"/>
             <a:ext cx="0" cy="2206021"/>
           </a:xfrm>
           <a:prstGeom prst="line">
@@ -18556,7 +18556,7 @@
         </p:nvSpPr>
         <p:spPr>
           <a:xfrm>
-            <a:off x="5130463" y="2046476"/>
+            <a:off x="5570730" y="2012608"/>
             <a:ext cx="316231" cy="300082"/>
           </a:xfrm>
           <a:prstGeom prst="rect">
@@ -18588,7 +18588,7 @@
         </p:nvSpPr>
         <p:spPr>
           <a:xfrm>
-            <a:off x="6167217" y="2046476"/>
+            <a:off x="6607484" y="2012608"/>
             <a:ext cx="316231" cy="300082"/>
           </a:xfrm>
           <a:prstGeom prst="rect">
@@ -18719,18 +18719,23 @@
         </p:nvSpPr>
         <p:spPr>
           <a:xfrm>
-            <a:off x="917120" y="844153"/>
-            <a:ext cx="7571425" cy="3671888"/>
+            <a:off x="872142" y="734083"/>
+            <a:ext cx="7769679" cy="3888717"/>
           </a:xfrm>
         </p:spPr>
         <p:txBody>
           <a:bodyPr>
-            <a:normAutofit fontScale="77500" lnSpcReduction="20000"/>
+            <a:noAutofit/>
           </a:bodyPr>
           <a:lstStyle/>
           <a:p>
-            <a:r>
-              <a:rPr lang="en-US" altLang="zh-TW" dirty="0">
+            <a:pPr>
+              <a:spcBef>
+                <a:spcPts val="0"/>
+              </a:spcBef>
+            </a:pPr>
+            <a:r>
+              <a:rPr lang="en-US" altLang="zh-TW" sz="1800" dirty="0">
                 <a:latin typeface="Times New Roman" panose="02020603050405020304" pitchFamily="18" charset="0"/>
                 <a:cs typeface="Times New Roman" panose="02020603050405020304" pitchFamily="18" charset="0"/>
               </a:rPr>
@@ -18738,23 +18743,27 @@
             </a:r>
           </a:p>
           <a:p>
-            <a:pPr lvl="1"/>
-            <a:r>
-              <a:rPr lang="en-US" altLang="zh-TW" sz="2600" dirty="0">
+            <a:pPr lvl="1">
+              <a:spcBef>
+                <a:spcPts val="0"/>
+              </a:spcBef>
+            </a:pPr>
+            <a:r>
+              <a:rPr lang="en-US" altLang="zh-TW" sz="1800" dirty="0">
                 <a:latin typeface="Times New Roman" panose="02020603050405020304" pitchFamily="18" charset="0"/>
                 <a:cs typeface="Times New Roman" panose="02020603050405020304" pitchFamily="18" charset="0"/>
               </a:rPr>
               <a:t>Reduce VM</a:t>
             </a:r>
             <a:r>
-              <a:rPr lang="zh-TW" altLang="en-US" sz="2600" dirty="0">
+              <a:rPr lang="zh-TW" altLang="en-US" sz="1800" dirty="0">
                 <a:latin typeface="Times New Roman" panose="02020603050405020304" pitchFamily="18" charset="0"/>
                 <a:cs typeface="Times New Roman" panose="02020603050405020304" pitchFamily="18" charset="0"/>
               </a:rPr>
               <a:t> </a:t>
             </a:r>
             <a:r>
-              <a:rPr lang="en-US" altLang="zh-TW" sz="2600" dirty="0">
+              <a:rPr lang="en-US" altLang="zh-TW" sz="1800" dirty="0">
                 <a:latin typeface="Times New Roman" panose="02020603050405020304" pitchFamily="18" charset="0"/>
                 <a:cs typeface="Times New Roman" panose="02020603050405020304" pitchFamily="18" charset="0"/>
               </a:rPr>
@@ -18762,9 +18771,13 @@
             </a:r>
           </a:p>
           <a:p>
-            <a:pPr lvl="1"/>
-            <a:r>
-              <a:rPr lang="en-US" altLang="zh-TW" sz="2600" dirty="0">
+            <a:pPr lvl="1">
+              <a:spcBef>
+                <a:spcPts val="0"/>
+              </a:spcBef>
+            </a:pPr>
+            <a:r>
+              <a:rPr lang="en-US" altLang="zh-TW" sz="1800" dirty="0">
                 <a:latin typeface="Times New Roman" panose="02020603050405020304" pitchFamily="18" charset="0"/>
                 <a:cs typeface="Times New Roman" panose="02020603050405020304" pitchFamily="18" charset="0"/>
               </a:rPr>
@@ -18772,9 +18785,13 @@
             </a:r>
           </a:p>
           <a:p>
-            <a:pPr lvl="1"/>
-            <a:r>
-              <a:rPr lang="en-US" altLang="zh-TW" sz="2600" dirty="0">
+            <a:pPr lvl="1">
+              <a:spcBef>
+                <a:spcPts val="0"/>
+              </a:spcBef>
+            </a:pPr>
+            <a:r>
+              <a:rPr lang="en-US" altLang="zh-TW" sz="1800" dirty="0">
                 <a:latin typeface="Times New Roman" panose="02020603050405020304" pitchFamily="18" charset="0"/>
                 <a:cs typeface="Times New Roman" panose="02020603050405020304" pitchFamily="18" charset="0"/>
               </a:rPr>
@@ -18782,14 +18799,13 @@
             </a:r>
           </a:p>
           <a:p>
-            <a:endParaRPr lang="en-US" altLang="zh-TW" dirty="0">
-              <a:latin typeface="Times New Roman" panose="02020603050405020304" pitchFamily="18" charset="0"/>
-              <a:cs typeface="Times New Roman" panose="02020603050405020304" pitchFamily="18" charset="0"/>
-            </a:endParaRPr>
-          </a:p>
-          <a:p>
-            <a:r>
-              <a:rPr lang="en-US" altLang="zh-TW" dirty="0">
+            <a:pPr>
+              <a:spcBef>
+                <a:spcPts val="0"/>
+              </a:spcBef>
+            </a:pPr>
+            <a:r>
+              <a:rPr lang="en-US" altLang="zh-TW" sz="1800" dirty="0">
                 <a:latin typeface="Times New Roman" panose="02020603050405020304" pitchFamily="18" charset="0"/>
                 <a:cs typeface="Times New Roman" panose="02020603050405020304" pitchFamily="18" charset="0"/>
               </a:rPr>
@@ -18797,9 +18813,13 @@
             </a:r>
           </a:p>
           <a:p>
-            <a:pPr lvl="1"/>
-            <a:r>
-              <a:rPr lang="en-US" altLang="zh-TW" sz="2600" dirty="0">
+            <a:pPr lvl="1">
+              <a:spcBef>
+                <a:spcPts val="0"/>
+              </a:spcBef>
+            </a:pPr>
+            <a:r>
+              <a:rPr lang="en-US" altLang="zh-TW" sz="1800" dirty="0">
                 <a:latin typeface="Times New Roman" panose="02020603050405020304" pitchFamily="18" charset="0"/>
                 <a:cs typeface="Times New Roman" panose="02020603050405020304" pitchFamily="18" charset="0"/>
               </a:rPr>
@@ -18807,9 +18827,13 @@
             </a:r>
           </a:p>
           <a:p>
-            <a:pPr lvl="1"/>
-            <a:r>
-              <a:rPr lang="en-US" altLang="zh-TW" sz="2600" dirty="0">
+            <a:pPr lvl="1">
+              <a:spcBef>
+                <a:spcPts val="0"/>
+              </a:spcBef>
+            </a:pPr>
+            <a:r>
+              <a:rPr lang="en-US" altLang="zh-TW" sz="1800" dirty="0">
                 <a:latin typeface="Times New Roman" panose="02020603050405020304" pitchFamily="18" charset="0"/>
                 <a:cs typeface="Times New Roman" panose="02020603050405020304" pitchFamily="18" charset="0"/>
               </a:rPr>
@@ -18817,14 +18841,32 @@
             </a:r>
           </a:p>
           <a:p>
-            <a:pPr lvl="1"/>
-            <a:r>
-              <a:rPr lang="en-US" altLang="zh-TW" sz="2600" dirty="0">
-                <a:latin typeface="Times New Roman" panose="02020603050405020304" pitchFamily="18" charset="0"/>
-                <a:cs typeface="Times New Roman" panose="02020603050405020304" pitchFamily="18" charset="0"/>
+            <a:pPr lvl="1">
+              <a:spcBef>
+                <a:spcPts val="0"/>
+              </a:spcBef>
+            </a:pPr>
+            <a:r>
+              <a:rPr lang="en-US" altLang="zh-TW" sz="1800" dirty="0"/>
+              <a:t>Only works on VMX </a:t>
+            </a:r>
+          </a:p>
+          <a:p>
+            <a:pPr lvl="2">
+              <a:spcBef>
+                <a:spcPts val="0"/>
+              </a:spcBef>
+            </a:pPr>
+            <a:r>
+              <a:rPr lang="en-US" sz="1800" b="0" i="0" dirty="0">
+                <a:solidFill>
+                  <a:srgbClr val="111111"/>
+                </a:solidFill>
+                <a:effectLst/>
               </a:rPr>
-              <a:t>Only works on VMX</a:t>
-            </a:r>
+              <a:t>Virtual Machine Extension (VMX) is Intel’s hardware virtualization support for x86 processors. It allows a hypervisor to run guest operating systems more efficiently by moving key virtualization functions into the CPU, reducing overhead and improving isolation. </a:t>
+            </a:r>
+            <a:endParaRPr lang="en-US" altLang="zh-TW" sz="1800" dirty="0"/>
           </a:p>
         </p:txBody>
       </p:sp>
@@ -18915,7 +18957,7 @@
         </p:blipFill>
         <p:spPr>
           <a:xfrm>
-            <a:off x="5375140" y="1734934"/>
+            <a:off x="5375140" y="1489401"/>
             <a:ext cx="3672608" cy="2382232"/>
           </a:xfrm>
           <a:prstGeom prst="rect">
@@ -18963,13 +19005,13 @@
         </p:nvSpPr>
         <p:spPr>
           <a:xfrm>
-            <a:off x="177684" y="872331"/>
-            <a:ext cx="5197456" cy="3398839"/>
+            <a:off x="650625" y="796130"/>
+            <a:ext cx="4724515" cy="3398839"/>
           </a:xfrm>
         </p:spPr>
         <p:txBody>
           <a:bodyPr>
-            <a:normAutofit/>
+            <a:normAutofit fontScale="92500"/>
           </a:bodyPr>
           <a:lstStyle/>
           <a:p>
@@ -19023,7 +19065,7 @@
               </a:spcBef>
             </a:pPr>
             <a:r>
-              <a:rPr lang="en-US" altLang="zh-TW" sz="1600" dirty="0"/>
+              <a:rPr lang="en-US" altLang="zh-TW" sz="1800" dirty="0"/>
               <a:t>We need to flush TLB to ensure the translation use the modified page  structures, then we can Intercept the TLB flush  operations and sync shadow pages</a:t>
             </a:r>
           </a:p>
@@ -19034,7 +19076,7 @@
               </a:spcBef>
             </a:pPr>
             <a:r>
-              <a:rPr lang="en-US" altLang="zh-TW" sz="1600" dirty="0"/>
+              <a:rPr lang="en-US" altLang="zh-TW" sz="1800" dirty="0"/>
               <a:t>Sometimes, TLB need not be flushed, then it can be  synced through page fault</a:t>
             </a:r>
           </a:p>
@@ -20101,7 +20143,7 @@
           <a:p>
             <a:pPr lvl="2"/>
             <a:r>
-              <a:rPr lang="en-US" sz="1800" dirty="0">
+              <a:rPr lang="en-US" dirty="0">
                 <a:latin typeface="Times New Roman" panose="02020603050405020304" pitchFamily="18" charset="0"/>
                 <a:cs typeface="Times New Roman" panose="02020603050405020304" pitchFamily="18" charset="0"/>
               </a:rPr>
@@ -20111,7 +20153,7 @@
           <a:p>
             <a:pPr lvl="2"/>
             <a:r>
-              <a:rPr lang="en-US" sz="1800" dirty="0">
+              <a:rPr lang="en-US" dirty="0">
                 <a:latin typeface="Times New Roman" panose="02020603050405020304" pitchFamily="18" charset="0"/>
                 <a:cs typeface="Times New Roman" panose="02020603050405020304" pitchFamily="18" charset="0"/>
               </a:rPr>
@@ -20319,8 +20361,8 @@
         </p:nvSpPr>
         <p:spPr>
           <a:xfrm>
-            <a:off x="873940" y="108349"/>
-            <a:ext cx="7801750" cy="519113"/>
+            <a:off x="905932" y="108349"/>
+            <a:ext cx="7769757" cy="519113"/>
           </a:xfrm>
         </p:spPr>
         <p:txBody>
@@ -20441,8 +20483,8 @@
         </p:nvSpPr>
         <p:spPr>
           <a:xfrm>
-            <a:off x="962952" y="108349"/>
-            <a:ext cx="7712738" cy="519113"/>
+            <a:off x="931333" y="108349"/>
+            <a:ext cx="7744357" cy="519113"/>
           </a:xfrm>
         </p:spPr>
         <p:txBody>
@@ -21062,7 +21104,7 @@
         </p:blipFill>
         <p:spPr bwMode="auto">
           <a:xfrm>
-            <a:off x="2955132" y="1479314"/>
+            <a:off x="3263141" y="1257932"/>
             <a:ext cx="4874419" cy="2651522"/>
           </a:xfrm>
           <a:prstGeom prst="rect">
@@ -21086,7 +21128,7 @@
         </p:nvSpPr>
         <p:spPr>
           <a:xfrm>
-            <a:off x="4162817" y="1733162"/>
+            <a:off x="4470826" y="1511780"/>
             <a:ext cx="248786" cy="230832"/>
           </a:xfrm>
           <a:prstGeom prst="rect">
@@ -21115,7 +21157,7 @@
         </p:nvSpPr>
         <p:spPr>
           <a:xfrm>
-            <a:off x="5210819" y="1560837"/>
+            <a:off x="5518828" y="1339455"/>
             <a:ext cx="248786" cy="230832"/>
           </a:xfrm>
           <a:prstGeom prst="rect">
@@ -21144,7 +21186,7 @@
         </p:nvSpPr>
         <p:spPr>
           <a:xfrm>
-            <a:off x="6250060" y="1382728"/>
+            <a:off x="6558069" y="1161346"/>
             <a:ext cx="248786" cy="230832"/>
           </a:xfrm>
           <a:prstGeom prst="rect">
@@ -21173,7 +21215,7 @@
         </p:nvSpPr>
         <p:spPr>
           <a:xfrm>
-            <a:off x="4901212" y="1733162"/>
+            <a:off x="5209221" y="1511780"/>
             <a:ext cx="248786" cy="230832"/>
           </a:xfrm>
           <a:prstGeom prst="rect">
@@ -21208,7 +21250,7 @@
         </p:nvSpPr>
         <p:spPr>
           <a:xfrm>
-            <a:off x="5921150" y="1560837"/>
+            <a:off x="6229159" y="1339455"/>
             <a:ext cx="248786" cy="230832"/>
           </a:xfrm>
           <a:prstGeom prst="rect">
@@ -21243,7 +21285,7 @@
         </p:nvSpPr>
         <p:spPr>
           <a:xfrm>
-            <a:off x="6949177" y="1382728"/>
+            <a:off x="7257186" y="1161346"/>
             <a:ext cx="248786" cy="230832"/>
           </a:xfrm>
           <a:prstGeom prst="rect">
@@ -21281,7 +21323,7 @@
         </p:nvCxnSpPr>
         <p:spPr>
           <a:xfrm flipH="1">
-            <a:off x="3468942" y="1963994"/>
+            <a:off x="3776951" y="1742612"/>
             <a:ext cx="818268" cy="845279"/>
           </a:xfrm>
           <a:prstGeom prst="straightConnector1">
@@ -21318,7 +21360,7 @@
         </p:nvCxnSpPr>
         <p:spPr>
           <a:xfrm>
-            <a:off x="4287210" y="1963994"/>
+            <a:off x="4595219" y="1742612"/>
             <a:ext cx="341985" cy="833418"/>
           </a:xfrm>
           <a:prstGeom prst="straightConnector1">
@@ -21354,7 +21396,7 @@
         </p:nvCxnSpPr>
         <p:spPr>
           <a:xfrm flipV="1">
-            <a:off x="4974251" y="1963994"/>
+            <a:off x="5282260" y="1742612"/>
             <a:ext cx="51354" cy="833418"/>
           </a:xfrm>
           <a:prstGeom prst="straightConnector1">
@@ -21390,7 +21432,7 @@
         </p:nvCxnSpPr>
         <p:spPr>
           <a:xfrm flipH="1">
-            <a:off x="3468942" y="1791669"/>
+            <a:off x="3776951" y="1570287"/>
             <a:ext cx="1866270" cy="1017604"/>
           </a:xfrm>
           <a:prstGeom prst="straightConnector1">
@@ -21427,7 +21469,7 @@
         </p:nvCxnSpPr>
         <p:spPr>
           <a:xfrm flipH="1">
-            <a:off x="4629195" y="1791669"/>
+            <a:off x="4937204" y="1570287"/>
             <a:ext cx="706017" cy="1005743"/>
           </a:xfrm>
           <a:prstGeom prst="straightConnector1">
@@ -21463,7 +21505,7 @@
         </p:nvCxnSpPr>
         <p:spPr>
           <a:xfrm flipV="1">
-            <a:off x="4974251" y="1791669"/>
+            <a:off x="5282260" y="1570287"/>
             <a:ext cx="1071292" cy="1005743"/>
           </a:xfrm>
           <a:prstGeom prst="straightConnector1">
@@ -21499,7 +21541,7 @@
         </p:nvCxnSpPr>
         <p:spPr>
           <a:xfrm flipH="1">
-            <a:off x="3468942" y="1613560"/>
+            <a:off x="3776951" y="1392178"/>
             <a:ext cx="2905511" cy="1195713"/>
           </a:xfrm>
           <a:prstGeom prst="straightConnector1">
@@ -21536,7 +21578,7 @@
         </p:nvCxnSpPr>
         <p:spPr>
           <a:xfrm flipH="1">
-            <a:off x="4629195" y="1613560"/>
+            <a:off x="4937204" y="1392178"/>
             <a:ext cx="1745258" cy="1183852"/>
           </a:xfrm>
           <a:prstGeom prst="straightConnector1">
@@ -21572,7 +21614,7 @@
         </p:nvCxnSpPr>
         <p:spPr>
           <a:xfrm flipV="1">
-            <a:off x="4974251" y="1613560"/>
+            <a:off x="5282260" y="1392178"/>
             <a:ext cx="2099319" cy="1183852"/>
           </a:xfrm>
           <a:prstGeom prst="straightConnector1">
@@ -21605,7 +21647,7 @@
         </p:nvSpPr>
         <p:spPr>
           <a:xfrm>
-            <a:off x="3326067" y="2809273"/>
+            <a:off x="3634076" y="2587891"/>
             <a:ext cx="285750" cy="228600"/>
           </a:xfrm>
           <a:prstGeom prst="rect">
@@ -21649,7 +21691,7 @@
         </p:nvSpPr>
         <p:spPr>
           <a:xfrm>
-            <a:off x="4486320" y="2797412"/>
+            <a:off x="4794329" y="2576030"/>
             <a:ext cx="285750" cy="228600"/>
           </a:xfrm>
           <a:prstGeom prst="rect">
@@ -21693,7 +21735,7 @@
         </p:nvSpPr>
         <p:spPr>
           <a:xfrm>
-            <a:off x="4831376" y="2797412"/>
+            <a:off x="5139385" y="2576030"/>
             <a:ext cx="285750" cy="228600"/>
           </a:xfrm>
           <a:prstGeom prst="rect">
@@ -21739,7 +21781,7 @@
         </p:nvCxnSpPr>
         <p:spPr>
           <a:xfrm>
-            <a:off x="7142153" y="1785668"/>
+            <a:off x="7450162" y="1564286"/>
             <a:ext cx="213528" cy="11541"/>
           </a:xfrm>
           <a:prstGeom prst="straightConnector1">
@@ -21772,7 +21814,7 @@
         </p:nvSpPr>
         <p:spPr>
           <a:xfrm>
-            <a:off x="7355681" y="1681793"/>
+            <a:off x="7663690" y="1460411"/>
             <a:ext cx="434734" cy="230832"/>
           </a:xfrm>
           <a:prstGeom prst="rect">
@@ -21810,8 +21852,8 @@
         </p:blipFill>
         <p:spPr bwMode="auto">
           <a:xfrm>
-            <a:off x="1219114" y="3440018"/>
-            <a:ext cx="2895686" cy="1085960"/>
+            <a:off x="79699" y="2942317"/>
+            <a:ext cx="4222793" cy="1583661"/>
           </a:xfrm>
           <a:prstGeom prst="rect">
             <a:avLst/>
@@ -23271,7 +23313,7 @@
         </p:nvSpPr>
         <p:spPr>
           <a:xfrm>
-            <a:off x="241844" y="942975"/>
+            <a:off x="241844" y="920115"/>
             <a:ext cx="2644775" cy="366399"/>
           </a:xfrm>
         </p:spPr>

--- a/Slides/CSC6103/VT-04 Memory Virtualization.pptx
+++ b/Slides/CSC6103/VT-04 Memory Virtualization.pptx
@@ -265,7 +265,7 @@
             <a:fld id="{45BDCE37-E9BE-4280-8D68-34E43D66CEDB}" type="datetimeFigureOut">
               <a:rPr lang="zh-TW" altLang="en-US" smtClean="0"/>
               <a:pPr/>
-              <a:t>2026/9/27</a:t>
+              <a:t>2026/10/9</a:t>
             </a:fld>
             <a:endParaRPr lang="zh-TW" altLang="en-US"/>
           </a:p>
@@ -432,7 +432,7 @@
             <a:fld id="{FBFBA883-381C-409E-9635-BB54B21745E4}" type="datetimeFigureOut">
               <a:rPr lang="zh-TW" altLang="en-US" smtClean="0"/>
               <a:pPr/>
-              <a:t>2026/9/27</a:t>
+              <a:t>2026/10/9</a:t>
             </a:fld>
             <a:endParaRPr lang="zh-TW" altLang="en-US"/>
           </a:p>
@@ -15230,7 +15230,7 @@
         </p:nvGrpSpPr>
         <p:grpSpPr>
           <a:xfrm>
-            <a:off x="1629151" y="1597869"/>
+            <a:off x="1661519" y="1597869"/>
             <a:ext cx="5885698" cy="2497658"/>
             <a:chOff x="1960050" y="2427160"/>
             <a:chExt cx="4700182" cy="1463329"/>
@@ -16114,7 +16114,7 @@
         </p:nvSpPr>
         <p:spPr>
           <a:xfrm>
-            <a:off x="2779762" y="2098296"/>
+            <a:off x="2990154" y="2227768"/>
             <a:ext cx="1099123" cy="1070492"/>
           </a:xfrm>
           <a:prstGeom prst="ellipse">
@@ -17352,7 +17352,7 @@
         </p:nvSpPr>
         <p:spPr>
           <a:xfrm>
-            <a:off x="4088365" y="2461269"/>
+            <a:off x="4242113" y="2517913"/>
             <a:ext cx="1029610" cy="974616"/>
           </a:xfrm>
           <a:prstGeom prst="ellipse">
@@ -17432,7 +17432,7 @@
         </p:nvCxnSpPr>
         <p:spPr>
           <a:xfrm>
-            <a:off x="5104167" y="2011590"/>
+            <a:off x="5274099" y="2011590"/>
             <a:ext cx="0" cy="2006563"/>
           </a:xfrm>
           <a:prstGeom prst="line">
@@ -19127,7 +19127,7 @@
           <a:p>
             <a:r>
               <a:rPr lang="en-US" altLang="zh-TW" dirty="0"/>
-              <a:t>SPT Optimization (4)</a:t>
+              <a:t>SPT Optimization (3)</a:t>
             </a:r>
             <a:endParaRPr lang="zh-TW" altLang="en-US" dirty="0"/>
           </a:p>
@@ -21062,7 +21062,7 @@
         </p:blipFill>
         <p:spPr bwMode="auto">
           <a:xfrm>
-            <a:off x="2955132" y="1479314"/>
+            <a:off x="3700201" y="1174513"/>
             <a:ext cx="4874419" cy="2651522"/>
           </a:xfrm>
           <a:prstGeom prst="rect">
@@ -21086,7 +21086,7 @@
         </p:nvSpPr>
         <p:spPr>
           <a:xfrm>
-            <a:off x="4162817" y="1733162"/>
+            <a:off x="4907886" y="1428361"/>
             <a:ext cx="248786" cy="230832"/>
           </a:xfrm>
           <a:prstGeom prst="rect">
@@ -21115,7 +21115,7 @@
         </p:nvSpPr>
         <p:spPr>
           <a:xfrm>
-            <a:off x="5210819" y="1560837"/>
+            <a:off x="5955888" y="1256036"/>
             <a:ext cx="248786" cy="230832"/>
           </a:xfrm>
           <a:prstGeom prst="rect">
@@ -21144,7 +21144,7 @@
         </p:nvSpPr>
         <p:spPr>
           <a:xfrm>
-            <a:off x="6250060" y="1382728"/>
+            <a:off x="6995129" y="1077927"/>
             <a:ext cx="248786" cy="230832"/>
           </a:xfrm>
           <a:prstGeom prst="rect">
@@ -21173,7 +21173,7 @@
         </p:nvSpPr>
         <p:spPr>
           <a:xfrm>
-            <a:off x="4901212" y="1733162"/>
+            <a:off x="5646281" y="1428361"/>
             <a:ext cx="248786" cy="230832"/>
           </a:xfrm>
           <a:prstGeom prst="rect">
@@ -21208,7 +21208,7 @@
         </p:nvSpPr>
         <p:spPr>
           <a:xfrm>
-            <a:off x="5921150" y="1560837"/>
+            <a:off x="6666219" y="1256036"/>
             <a:ext cx="248786" cy="230832"/>
           </a:xfrm>
           <a:prstGeom prst="rect">
@@ -21243,7 +21243,7 @@
         </p:nvSpPr>
         <p:spPr>
           <a:xfrm>
-            <a:off x="6949177" y="1382728"/>
+            <a:off x="7694246" y="1077927"/>
             <a:ext cx="248786" cy="230832"/>
           </a:xfrm>
           <a:prstGeom prst="rect">
@@ -21281,7 +21281,7 @@
         </p:nvCxnSpPr>
         <p:spPr>
           <a:xfrm flipH="1">
-            <a:off x="3468942" y="1963994"/>
+            <a:off x="4214011" y="1659193"/>
             <a:ext cx="818268" cy="845279"/>
           </a:xfrm>
           <a:prstGeom prst="straightConnector1">
@@ -21318,7 +21318,7 @@
         </p:nvCxnSpPr>
         <p:spPr>
           <a:xfrm>
-            <a:off x="4287210" y="1963994"/>
+            <a:off x="5032279" y="1659193"/>
             <a:ext cx="341985" cy="833418"/>
           </a:xfrm>
           <a:prstGeom prst="straightConnector1">
@@ -21354,7 +21354,7 @@
         </p:nvCxnSpPr>
         <p:spPr>
           <a:xfrm flipV="1">
-            <a:off x="4974251" y="1963994"/>
+            <a:off x="5719320" y="1659193"/>
             <a:ext cx="51354" cy="833418"/>
           </a:xfrm>
           <a:prstGeom prst="straightConnector1">
@@ -21390,7 +21390,7 @@
         </p:nvCxnSpPr>
         <p:spPr>
           <a:xfrm flipH="1">
-            <a:off x="3468942" y="1791669"/>
+            <a:off x="4214011" y="1486868"/>
             <a:ext cx="1866270" cy="1017604"/>
           </a:xfrm>
           <a:prstGeom prst="straightConnector1">
@@ -21427,7 +21427,7 @@
         </p:nvCxnSpPr>
         <p:spPr>
           <a:xfrm flipH="1">
-            <a:off x="4629195" y="1791669"/>
+            <a:off x="5374264" y="1486868"/>
             <a:ext cx="706017" cy="1005743"/>
           </a:xfrm>
           <a:prstGeom prst="straightConnector1">
@@ -21463,7 +21463,7 @@
         </p:nvCxnSpPr>
         <p:spPr>
           <a:xfrm flipV="1">
-            <a:off x="4974251" y="1791669"/>
+            <a:off x="5719320" y="1486868"/>
             <a:ext cx="1071292" cy="1005743"/>
           </a:xfrm>
           <a:prstGeom prst="straightConnector1">
@@ -21499,7 +21499,7 @@
         </p:nvCxnSpPr>
         <p:spPr>
           <a:xfrm flipH="1">
-            <a:off x="3468942" y="1613560"/>
+            <a:off x="4214011" y="1308759"/>
             <a:ext cx="2905511" cy="1195713"/>
           </a:xfrm>
           <a:prstGeom prst="straightConnector1">
@@ -21536,7 +21536,7 @@
         </p:nvCxnSpPr>
         <p:spPr>
           <a:xfrm flipH="1">
-            <a:off x="4629195" y="1613560"/>
+            <a:off x="5374264" y="1308759"/>
             <a:ext cx="1745258" cy="1183852"/>
           </a:xfrm>
           <a:prstGeom prst="straightConnector1">
@@ -21572,7 +21572,7 @@
         </p:nvCxnSpPr>
         <p:spPr>
           <a:xfrm flipV="1">
-            <a:off x="4974251" y="1613560"/>
+            <a:off x="5719320" y="1308759"/>
             <a:ext cx="2099319" cy="1183852"/>
           </a:xfrm>
           <a:prstGeom prst="straightConnector1">
@@ -21605,7 +21605,7 @@
         </p:nvSpPr>
         <p:spPr>
           <a:xfrm>
-            <a:off x="3326067" y="2809273"/>
+            <a:off x="4071136" y="2504472"/>
             <a:ext cx="285750" cy="228600"/>
           </a:xfrm>
           <a:prstGeom prst="rect">
@@ -21649,7 +21649,7 @@
         </p:nvSpPr>
         <p:spPr>
           <a:xfrm>
-            <a:off x="4486320" y="2797412"/>
+            <a:off x="5231389" y="2492611"/>
             <a:ext cx="285750" cy="228600"/>
           </a:xfrm>
           <a:prstGeom prst="rect">
@@ -21693,7 +21693,7 @@
         </p:nvSpPr>
         <p:spPr>
           <a:xfrm>
-            <a:off x="4831376" y="2797412"/>
+            <a:off x="5576445" y="2492611"/>
             <a:ext cx="285750" cy="228600"/>
           </a:xfrm>
           <a:prstGeom prst="rect">
@@ -21739,7 +21739,7 @@
         </p:nvCxnSpPr>
         <p:spPr>
           <a:xfrm>
-            <a:off x="7142153" y="1785668"/>
+            <a:off x="7887222" y="1480867"/>
             <a:ext cx="213528" cy="11541"/>
           </a:xfrm>
           <a:prstGeom prst="straightConnector1">
@@ -21772,7 +21772,7 @@
         </p:nvSpPr>
         <p:spPr>
           <a:xfrm>
-            <a:off x="7355681" y="1681793"/>
+            <a:off x="8100750" y="1376992"/>
             <a:ext cx="434734" cy="230832"/>
           </a:xfrm>
           <a:prstGeom prst="rect">
@@ -21810,8 +21810,8 @@
         </p:blipFill>
         <p:spPr bwMode="auto">
           <a:xfrm>
-            <a:off x="1219114" y="3440018"/>
-            <a:ext cx="2895686" cy="1085960"/>
+            <a:off x="-3253" y="2850352"/>
+            <a:ext cx="4693785" cy="1760295"/>
           </a:xfrm>
           <a:prstGeom prst="rect">
             <a:avLst/>
